--- a/dist/초1/음악·미술/음악놀이/초1_음악·미술_음악놀이_01_박에맞춰노래하기.pptx
+++ b/dist/초1/음악·미술/음악놀이/초1_음악·미술_음악놀이_01_박에맞춰노래하기.pptx
@@ -114,34 +114,34 @@
   <p:extLst>
     <p:ext uri="{521415D9-36F7-43E2-AB2F-B90AF26B5E84}">
       <p14:sectionLst xmlns:p14="http://schemas.microsoft.com/office/powerpoint/2010/main">
-        <p14:section name="도입" id="{9bccaaac-04d7-65cd-9049-8e85dd31bb3d}">
+        <p14:section name="도입" id="{34717593-c683-dc67-f01d-d0aa7646db5b}">
           <p14:sldIdLst>
             <p14:sldId id="256"/>
             <p14:sldId id="257"/>
           </p14:sldIdLst>
         </p14:section>
-        <p14:section name="개념" id="{5642eaff-b892-de96-9a2d-8d7f1559cad9}">
+        <p14:section name="개념" id="{97bd9e49-bc63-fc98-e67f-d0be371392b3}">
           <p14:sldIdLst>
             <p14:sldId id="258"/>
           </p14:sldIdLst>
         </p14:section>
-        <p14:section name="연습" id="{79809cf3-d926-06dd-f7d8-d07a128b00ae}">
+        <p14:section name="연습" id="{c9501623-f672-bc16-6c7f-732556228c87}">
           <p14:sldIdLst>
             <p14:sldId id="259"/>
             <p14:sldId id="260"/>
           </p14:sldIdLst>
         </p14:section>
-        <p14:section name="확인" id="{ee7451b3-0916-bb6d-dd09-6111e1758f06}">
+        <p14:section name="확인" id="{90b6bb04-13c5-bdc5-8098-daff46b2fb6f}">
           <p14:sldIdLst>
             <p14:sldId id="261"/>
           </p14:sldIdLst>
         </p14:section>
-        <p14:section name="정리" id="{474cbda5-442a-bc4c-4ef8-9761c89fccbb}">
+        <p14:section name="정리" id="{3841ae82-314a-b122-1506-30e0743a2023}">
           <p14:sldIdLst>
             <p14:sldId id="262"/>
           </p14:sldIdLst>
         </p14:section>
-        <p14:section name="보충" id="{d29ed590-1aae-b495-4779-95c3ced9d2ac}">
+        <p14:section name="보충" id="{de661225-cc17-b25d-3938-1e912c1d378d}">
           <p14:sldIdLst>
             <p14:sldId id="263"/>
           </p14:sldIdLst>

--- a/dist/초1/음악·미술/음악놀이/초1_음악·미술_음악놀이_01_박에맞춰노래하기.pptx
+++ b/dist/초1/음악·미술/음악놀이/초1_음악·미술_음악놀이_01_박에맞춰노래하기.pptx
@@ -114,34 +114,34 @@
   <p:extLst>
     <p:ext uri="{521415D9-36F7-43E2-AB2F-B90AF26B5E84}">
       <p14:sectionLst xmlns:p14="http://schemas.microsoft.com/office/powerpoint/2010/main">
-        <p14:section name="도입" id="{34717593-c683-dc67-f01d-d0aa7646db5b}">
+        <p14:section name="도입" id="{50065e79-f73c-35a3-7ea7-951ce923f4dd}">
           <p14:sldIdLst>
             <p14:sldId id="256"/>
             <p14:sldId id="257"/>
           </p14:sldIdLst>
         </p14:section>
-        <p14:section name="개념" id="{97bd9e49-bc63-fc98-e67f-d0be371392b3}">
+        <p14:section name="개념" id="{5eb515a6-e607-8cdd-4a33-1e3f1ac8b982}">
           <p14:sldIdLst>
             <p14:sldId id="258"/>
           </p14:sldIdLst>
         </p14:section>
-        <p14:section name="연습" id="{c9501623-f672-bc16-6c7f-732556228c87}">
+        <p14:section name="연습" id="{382e0604-79f8-6608-1751-820f5a23f886}">
           <p14:sldIdLst>
             <p14:sldId id="259"/>
             <p14:sldId id="260"/>
           </p14:sldIdLst>
         </p14:section>
-        <p14:section name="확인" id="{90b6bb04-13c5-bdc5-8098-daff46b2fb6f}">
+        <p14:section name="확인" id="{d9c21334-d915-158e-2672-9dc13b60430a}">
           <p14:sldIdLst>
             <p14:sldId id="261"/>
           </p14:sldIdLst>
         </p14:section>
-        <p14:section name="정리" id="{3841ae82-314a-b122-1506-30e0743a2023}">
+        <p14:section name="정리" id="{097bf8bb-43dd-880f-fe73-5feadefdbca1}">
           <p14:sldIdLst>
             <p14:sldId id="262"/>
           </p14:sldIdLst>
         </p14:section>
-        <p14:section name="보충" id="{de661225-cc17-b25d-3938-1e912c1d378d}">
+        <p14:section name="보충" id="{de738fa2-aad6-a8df-8b31-a36c752efd4c}">
           <p14:sldIdLst>
             <p14:sldId id="263"/>
           </p14:sldIdLst>
